--- a/corpus/officecli/clean_bilingual.pptx
+++ b/corpus/officecli/clean_bilingual.pptx
@@ -5,7 +5,7 @@
     <p:sldMasterId xmlns:r="http://schemas.openxmlformats.org/officeDocument/2006/relationships" id="2147483648" r:id="rId1"/>
   </p:sldMasterIdLst>
   <p:sldIdLst>
-    <p:sldId id="256" r:id="R497485babbbf48fd"/>
+    <p:sldId id="256" r:id="R0979fad122b64164"/>
   </p:sldIdLst>
   <p:sldSz cx="12192000" cy="6858000"/>
   <p:notesSz cx="6858000" cy="9144000"/>
